--- a/presentation&report/Group3_Project_Part1+2+3_V0.1.pptx
+++ b/presentation&report/Group3_Project_Part1+2+3_V0.1.pptx
@@ -234,7 +234,7 @@
           <a:p>
             <a:fld id="{BEFA587A-38EB-4614-822E-5EB92258F22F}" type="datetimeFigureOut">
               <a:rPr lang="zh-CN" altLang="en-US" smtClean="0"/>
-              <a:t>2026/3/30</a:t>
+              <a:t>2026/4/2</a:t>
             </a:fld>
             <a:endParaRPr lang="zh-CN" altLang="en-US"/>
           </a:p>
@@ -1542,7 +1542,7 @@
           <a:p>
             <a:fld id="{5BCAD085-E8A6-8845-BD4E-CB4CCA059FC4}" type="datetimeFigureOut">
               <a:rPr lang="en-US" smtClean="0"/>
-              <a:t>3/30/2026</a:t>
+              <a:t>4/2/2026</a:t>
             </a:fld>
             <a:endParaRPr lang="en-US"/>
           </a:p>
@@ -1707,7 +1707,7 @@
           <a:p>
             <a:fld id="{5BCAD085-E8A6-8845-BD4E-CB4CCA059FC4}" type="datetimeFigureOut">
               <a:rPr lang="en-US" smtClean="0"/>
-              <a:t>3/30/2026</a:t>
+              <a:t>4/2/2026</a:t>
             </a:fld>
             <a:endParaRPr lang="en-US"/>
           </a:p>
@@ -1882,7 +1882,7 @@
           <a:p>
             <a:fld id="{5BCAD085-E8A6-8845-BD4E-CB4CCA059FC4}" type="datetimeFigureOut">
               <a:rPr lang="en-US" smtClean="0"/>
-              <a:t>3/30/2026</a:t>
+              <a:t>4/2/2026</a:t>
             </a:fld>
             <a:endParaRPr lang="en-US"/>
           </a:p>
@@ -2047,7 +2047,7 @@
           <a:p>
             <a:fld id="{5BCAD085-E8A6-8845-BD4E-CB4CCA059FC4}" type="datetimeFigureOut">
               <a:rPr lang="en-US" smtClean="0"/>
-              <a:t>3/30/2026</a:t>
+              <a:t>4/2/2026</a:t>
             </a:fld>
             <a:endParaRPr lang="en-US"/>
           </a:p>
@@ -2288,7 +2288,7 @@
           <a:p>
             <a:fld id="{5BCAD085-E8A6-8845-BD4E-CB4CCA059FC4}" type="datetimeFigureOut">
               <a:rPr lang="en-US" smtClean="0"/>
-              <a:t>3/30/2026</a:t>
+              <a:t>4/2/2026</a:t>
             </a:fld>
             <a:endParaRPr lang="en-US"/>
           </a:p>
@@ -2515,7 +2515,7 @@
           <a:p>
             <a:fld id="{5BCAD085-E8A6-8845-BD4E-CB4CCA059FC4}" type="datetimeFigureOut">
               <a:rPr lang="en-US" smtClean="0"/>
-              <a:t>3/30/2026</a:t>
+              <a:t>4/2/2026</a:t>
             </a:fld>
             <a:endParaRPr lang="en-US"/>
           </a:p>
@@ -2877,7 +2877,7 @@
           <a:p>
             <a:fld id="{5BCAD085-E8A6-8845-BD4E-CB4CCA059FC4}" type="datetimeFigureOut">
               <a:rPr lang="en-US" smtClean="0"/>
-              <a:t>3/30/2026</a:t>
+              <a:t>4/2/2026</a:t>
             </a:fld>
             <a:endParaRPr lang="en-US"/>
           </a:p>
@@ -2990,7 +2990,7 @@
           <a:p>
             <a:fld id="{5BCAD085-E8A6-8845-BD4E-CB4CCA059FC4}" type="datetimeFigureOut">
               <a:rPr lang="en-US" smtClean="0"/>
-              <a:t>3/30/2026</a:t>
+              <a:t>4/2/2026</a:t>
             </a:fld>
             <a:endParaRPr lang="en-US"/>
           </a:p>
@@ -3080,7 +3080,7 @@
           <a:p>
             <a:fld id="{5BCAD085-E8A6-8845-BD4E-CB4CCA059FC4}" type="datetimeFigureOut">
               <a:rPr lang="en-US" smtClean="0"/>
-              <a:t>3/30/2026</a:t>
+              <a:t>4/2/2026</a:t>
             </a:fld>
             <a:endParaRPr lang="en-US"/>
           </a:p>
@@ -3352,7 +3352,7 @@
           <a:p>
             <a:fld id="{5BCAD085-E8A6-8845-BD4E-CB4CCA059FC4}" type="datetimeFigureOut">
               <a:rPr lang="en-US" smtClean="0"/>
-              <a:t>3/30/2026</a:t>
+              <a:t>4/2/2026</a:t>
             </a:fld>
             <a:endParaRPr lang="en-US"/>
           </a:p>
@@ -3604,7 +3604,7 @@
           <a:p>
             <a:fld id="{5BCAD085-E8A6-8845-BD4E-CB4CCA059FC4}" type="datetimeFigureOut">
               <a:rPr lang="en-US" smtClean="0"/>
-              <a:t>3/30/2026</a:t>
+              <a:t>4/2/2026</a:t>
             </a:fld>
             <a:endParaRPr lang="en-US"/>
           </a:p>
@@ -3812,7 +3812,7 @@
           <a:p>
             <a:fld id="{5BCAD085-E8A6-8845-BD4E-CB4CCA059FC4}" type="datetimeFigureOut">
               <a:rPr lang="en-US" smtClean="0"/>
-              <a:t>3/30/2026</a:t>
+              <a:t>4/2/2026</a:t>
             </a:fld>
             <a:endParaRPr lang="en-US"/>
           </a:p>
@@ -6994,8 +6994,8 @@
           </a:p>
         </p:txBody>
       </p:sp>
-      <mc:AlternateContent xmlns:mc="http://schemas.openxmlformats.org/markup-compatibility/2006" xmlns:a14="http://schemas.microsoft.com/office/drawing/2010/main">
-        <mc:Choice Requires="a14">
+      <mc:AlternateContent xmlns:mc="http://schemas.openxmlformats.org/markup-compatibility/2006">
+        <mc:Choice xmlns:a14="http://schemas.microsoft.com/office/drawing/2010/main" Requires="a14">
           <p:sp>
             <p:nvSpPr>
               <p:cNvPr id="4" name="Content Placeholder 4">
@@ -7014,8 +7014,8 @@
             </p:nvSpPr>
             <p:spPr>
               <a:xfrm>
-                <a:off x="1242615" y="1603375"/>
-                <a:ext cx="9706769" cy="3651249"/>
+                <a:off x="1242615" y="841376"/>
+                <a:ext cx="9706769" cy="5796491"/>
               </a:xfrm>
             </p:spPr>
             <p:txBody>
@@ -7191,6 +7191,30 @@
                 <a:endParaRPr lang="en-US" altLang="zh-CN" dirty="0"/>
               </a:p>
               <a:p>
+                <a:pPr marL="0" indent="0">
+                  <a:buNone/>
+                </a:pPr>
+                <a:endParaRPr lang="en-US" altLang="zh-CN" dirty="0"/>
+              </a:p>
+              <a:p>
+                <a:pPr marL="0" indent="0">
+                  <a:buNone/>
+                </a:pPr>
+                <a:endParaRPr lang="en-US" altLang="zh-CN" dirty="0"/>
+              </a:p>
+              <a:p>
+                <a:pPr marL="0" indent="0">
+                  <a:buNone/>
+                </a:pPr>
+                <a:endParaRPr lang="en-US" altLang="zh-CN" dirty="0"/>
+              </a:p>
+              <a:p>
+                <a:pPr marL="0" indent="0">
+                  <a:buNone/>
+                </a:pPr>
+                <a:endParaRPr lang="en-US" altLang="zh-CN" dirty="0"/>
+              </a:p>
+              <a:p>
                 <a:r>
                   <a:rPr lang="en-US" altLang="zh-CN" dirty="0"/>
                   <a:t>Larger drop </a:t>
@@ -7247,7 +7271,7 @@
             </p:txBody>
           </p:sp>
         </mc:Choice>
-        <mc:Fallback xmlns="">
+        <mc:Fallback>
           <p:sp>
             <p:nvSpPr>
               <p:cNvPr id="4" name="Content Placeholder 4">
@@ -7266,13 +7290,13 @@
             </p:nvSpPr>
             <p:spPr>
               <a:xfrm>
-                <a:off x="1242615" y="1603375"/>
-                <a:ext cx="9706769" cy="3651249"/>
+                <a:off x="1242615" y="841376"/>
+                <a:ext cx="9706769" cy="5796491"/>
               </a:xfrm>
               <a:blipFill>
                 <a:blip r:embed="rId3"/>
                 <a:stretch>
-                  <a:fillRect l="-1319" t="-3005" r="-440"/>
+                  <a:fillRect l="-1319" t="-1893" r="-440"/>
                 </a:stretch>
               </a:blipFill>
             </p:spPr>
@@ -7291,6 +7315,816 @@
           </p:sp>
         </mc:Fallback>
       </mc:AlternateContent>
+      <p:grpSp>
+        <p:nvGrpSpPr>
+          <p:cNvPr id="17" name="Group 16">
+            <a:extLst>
+              <a:ext uri="{FF2B5EF4-FFF2-40B4-BE49-F238E27FC236}">
+                <a16:creationId xmlns:a16="http://schemas.microsoft.com/office/drawing/2014/main" id="{16CAE30A-FA41-42AF-0789-3964E323575B}"/>
+              </a:ext>
+            </a:extLst>
+          </p:cNvPr>
+          <p:cNvGrpSpPr/>
+          <p:nvPr/>
+        </p:nvGrpSpPr>
+        <p:grpSpPr>
+          <a:xfrm>
+            <a:off x="2117947" y="2748939"/>
+            <a:ext cx="7576299" cy="2557718"/>
+            <a:chOff x="2177301" y="2833606"/>
+            <a:chExt cx="7576299" cy="2557718"/>
+          </a:xfrm>
+        </p:grpSpPr>
+        <p:grpSp>
+          <p:nvGrpSpPr>
+            <p:cNvPr id="3" name="Group 2">
+              <a:extLst>
+                <a:ext uri="{FF2B5EF4-FFF2-40B4-BE49-F238E27FC236}">
+                  <a16:creationId xmlns:a16="http://schemas.microsoft.com/office/drawing/2014/main" id="{D8AAF7A3-06B1-157B-C8A3-D31EDDC2D09C}"/>
+                </a:ext>
+              </a:extLst>
+            </p:cNvPr>
+            <p:cNvGrpSpPr>
+              <a:grpSpLocks noChangeAspect="1"/>
+            </p:cNvGrpSpPr>
+            <p:nvPr/>
+          </p:nvGrpSpPr>
+          <p:grpSpPr>
+            <a:xfrm>
+              <a:off x="2177301" y="2833606"/>
+              <a:ext cx="1636714" cy="2280719"/>
+              <a:chOff x="1186318" y="2698140"/>
+              <a:chExt cx="2012623" cy="2804538"/>
+            </a:xfrm>
+          </p:grpSpPr>
+          <p:pic>
+            <p:nvPicPr>
+              <p:cNvPr id="5" name="Picture 6" descr="A Dog Face in Front of the Camera Faceing Used for Print Media Stock Image  - Image of lens, media: 372062409">
+                <a:extLst>
+                  <a:ext uri="{FF2B5EF4-FFF2-40B4-BE49-F238E27FC236}">
+                    <a16:creationId xmlns:a16="http://schemas.microsoft.com/office/drawing/2014/main" id="{A502E971-8516-20B9-FE02-B71AC487C8A6}"/>
+                  </a:ext>
+                </a:extLst>
+              </p:cNvPr>
+              <p:cNvPicPr>
+                <a:picLocks noChangeAspect="1" noChangeArrowheads="1"/>
+              </p:cNvPicPr>
+              <p:nvPr/>
+            </p:nvPicPr>
+            <p:blipFill>
+              <a:blip r:embed="rId4">
+                <a:extLst>
+                  <a:ext uri="{28A0092B-C50C-407E-A947-70E740481C1C}">
+                    <a14:useLocalDpi xmlns:a14="http://schemas.microsoft.com/office/drawing/2010/main" val="0"/>
+                  </a:ext>
+                </a:extLst>
+              </a:blip>
+              <a:srcRect/>
+              <a:stretch>
+                <a:fillRect/>
+              </a:stretch>
+            </p:blipFill>
+            <p:spPr bwMode="auto">
+              <a:xfrm>
+                <a:off x="1222812" y="2698140"/>
+                <a:ext cx="1939636" cy="1939636"/>
+              </a:xfrm>
+              <a:prstGeom prst="rect">
+                <a:avLst/>
+              </a:prstGeom>
+              <a:noFill/>
+              <a:ln>
+                <a:solidFill>
+                  <a:schemeClr val="tx1"/>
+                </a:solidFill>
+              </a:ln>
+              <a:extLst>
+                <a:ext uri="{909E8E84-426E-40DD-AFC4-6F175D3DCCD1}">
+                  <a14:hiddenFill xmlns:a14="http://schemas.microsoft.com/office/drawing/2010/main">
+                    <a:solidFill>
+                      <a:srgbClr val="FFFFFF"/>
+                    </a:solidFill>
+                  </a14:hiddenFill>
+                </a:ext>
+              </a:extLst>
+            </p:spPr>
+          </p:pic>
+          <p:sp>
+            <p:nvSpPr>
+              <p:cNvPr id="6" name="TextBox 5">
+                <a:extLst>
+                  <a:ext uri="{FF2B5EF4-FFF2-40B4-BE49-F238E27FC236}">
+                    <a16:creationId xmlns:a16="http://schemas.microsoft.com/office/drawing/2014/main" id="{4D085F9A-E59A-729D-BE98-6E24991CCA6A}"/>
+                  </a:ext>
+                </a:extLst>
+              </p:cNvPr>
+              <p:cNvSpPr txBox="1"/>
+              <p:nvPr/>
+            </p:nvSpPr>
+            <p:spPr>
+              <a:xfrm>
+                <a:off x="1186318" y="4707902"/>
+                <a:ext cx="2012623" cy="794776"/>
+              </a:xfrm>
+              <a:prstGeom prst="rect">
+                <a:avLst/>
+              </a:prstGeom>
+              <a:noFill/>
+            </p:spPr>
+            <p:txBody>
+              <a:bodyPr wrap="square">
+                <a:spAutoFit/>
+              </a:bodyPr>
+              <a:lstStyle/>
+              <a:p>
+                <a:pPr algn="ctr"/>
+                <a:r>
+                  <a:rPr lang="en-US" dirty="0">
+                    <a:latin typeface="Freesentation 8 ExtraBold" pitchFamily="2" charset="-127"/>
+                    <a:ea typeface="Freesentation 8 ExtraBold" pitchFamily="2" charset="-127"/>
+                    <a:cs typeface="Times New Roman" panose="02020603050405020304" pitchFamily="18" charset="0"/>
+                  </a:rPr>
+                  <a:t>Original Input</a:t>
+                </a:r>
+              </a:p>
+              <a:p>
+                <a:pPr algn="ctr"/>
+                <a:r>
+                  <a:rPr lang="en-US" dirty="0"/>
+                  <a:t>Dog: 0.973</a:t>
+                </a:r>
+                <a:endParaRPr lang="en-KR" dirty="0"/>
+              </a:p>
+            </p:txBody>
+          </p:sp>
+        </p:grpSp>
+        <p:grpSp>
+          <p:nvGrpSpPr>
+            <p:cNvPr id="8" name="Group 7">
+              <a:extLst>
+                <a:ext uri="{FF2B5EF4-FFF2-40B4-BE49-F238E27FC236}">
+                  <a16:creationId xmlns:a16="http://schemas.microsoft.com/office/drawing/2014/main" id="{1010697C-C0A5-C201-2824-58F7024DEBC3}"/>
+                </a:ext>
+              </a:extLst>
+            </p:cNvPr>
+            <p:cNvGrpSpPr>
+              <a:grpSpLocks noChangeAspect="1"/>
+            </p:cNvGrpSpPr>
+            <p:nvPr/>
+          </p:nvGrpSpPr>
+          <p:grpSpPr>
+            <a:xfrm>
+              <a:off x="4141568" y="2833606"/>
+              <a:ext cx="1708986" cy="2557718"/>
+              <a:chOff x="1186318" y="2698140"/>
+              <a:chExt cx="2101494" cy="3145156"/>
+            </a:xfrm>
+          </p:grpSpPr>
+          <p:pic>
+            <p:nvPicPr>
+              <p:cNvPr id="9" name="Picture 6" descr="A Dog Face in Front of the Camera Faceing Used for Print Media Stock Image  - Image of lens, media: 372062409">
+                <a:extLst>
+                  <a:ext uri="{FF2B5EF4-FFF2-40B4-BE49-F238E27FC236}">
+                    <a16:creationId xmlns:a16="http://schemas.microsoft.com/office/drawing/2014/main" id="{666FEE55-BFD7-8393-8E30-B52F784E3956}"/>
+                  </a:ext>
+                </a:extLst>
+              </p:cNvPr>
+              <p:cNvPicPr>
+                <a:picLocks noChangeAspect="1" noChangeArrowheads="1"/>
+              </p:cNvPicPr>
+              <p:nvPr/>
+            </p:nvPicPr>
+            <p:blipFill>
+              <a:blip r:embed="rId4">
+                <a:extLst>
+                  <a:ext uri="{28A0092B-C50C-407E-A947-70E740481C1C}">
+                    <a14:useLocalDpi xmlns:a14="http://schemas.microsoft.com/office/drawing/2010/main" val="0"/>
+                  </a:ext>
+                </a:extLst>
+              </a:blip>
+              <a:srcRect/>
+              <a:stretch>
+                <a:fillRect/>
+              </a:stretch>
+            </p:blipFill>
+            <p:spPr bwMode="auto">
+              <a:xfrm>
+                <a:off x="1222812" y="2698140"/>
+                <a:ext cx="1939636" cy="1939636"/>
+              </a:xfrm>
+              <a:prstGeom prst="rect">
+                <a:avLst/>
+              </a:prstGeom>
+              <a:noFill/>
+              <a:ln>
+                <a:solidFill>
+                  <a:schemeClr val="tx1"/>
+                </a:solidFill>
+              </a:ln>
+              <a:extLst>
+                <a:ext uri="{909E8E84-426E-40DD-AFC4-6F175D3DCCD1}">
+                  <a14:hiddenFill xmlns:a14="http://schemas.microsoft.com/office/drawing/2010/main">
+                    <a:solidFill>
+                      <a:srgbClr val="FFFFFF"/>
+                    </a:solidFill>
+                  </a14:hiddenFill>
+                </a:ext>
+              </a:extLst>
+            </p:spPr>
+          </p:pic>
+          <p:sp>
+            <p:nvSpPr>
+              <p:cNvPr id="10" name="TextBox 9">
+                <a:extLst>
+                  <a:ext uri="{FF2B5EF4-FFF2-40B4-BE49-F238E27FC236}">
+                    <a16:creationId xmlns:a16="http://schemas.microsoft.com/office/drawing/2014/main" id="{5A195631-CCE1-F5A2-2D30-A14D81AC46A6}"/>
+                  </a:ext>
+                </a:extLst>
+              </p:cNvPr>
+              <p:cNvSpPr txBox="1"/>
+              <p:nvPr/>
+            </p:nvSpPr>
+            <p:spPr>
+              <a:xfrm>
+                <a:off x="1186318" y="4707902"/>
+                <a:ext cx="2101494" cy="1135394"/>
+              </a:xfrm>
+              <a:prstGeom prst="rect">
+                <a:avLst/>
+              </a:prstGeom>
+              <a:noFill/>
+            </p:spPr>
+            <p:txBody>
+              <a:bodyPr wrap="square">
+                <a:spAutoFit/>
+              </a:bodyPr>
+              <a:lstStyle/>
+              <a:p>
+                <a:pPr algn="ctr"/>
+                <a:r>
+                  <a:rPr lang="en-US" dirty="0">
+                    <a:latin typeface="Freesentation 8 ExtraBold" pitchFamily="2" charset="-127"/>
+                    <a:ea typeface="Freesentation 8 ExtraBold" pitchFamily="2" charset="-127"/>
+                    <a:cs typeface="Times New Roman" panose="02020603050405020304" pitchFamily="18" charset="0"/>
+                  </a:rPr>
+                  <a:t>Deletion Test1</a:t>
+                </a:r>
+              </a:p>
+              <a:p>
+                <a:pPr algn="ctr"/>
+                <a:r>
+                  <a:rPr lang="en-US" dirty="0"/>
+                  <a:t>Dog: 0.972</a:t>
+                </a:r>
+              </a:p>
+              <a:p>
+                <a:pPr algn="ctr"/>
+                <a:r>
+                  <a:rPr lang="en-US" b="1" dirty="0" err="1">
+                    <a:solidFill>
+                      <a:srgbClr val="FF0000"/>
+                    </a:solidFill>
+                  </a:rPr>
+                  <a:t>FaithDrop</a:t>
+                </a:r>
+                <a:r>
+                  <a:rPr lang="zh-CN" altLang="en-US" b="1" dirty="0">
+                    <a:solidFill>
+                      <a:srgbClr val="FF0000"/>
+                    </a:solidFill>
+                  </a:rPr>
+                  <a:t>≈</a:t>
+                </a:r>
+                <a:r>
+                  <a:rPr lang="en-US" altLang="zh-CN" b="1" dirty="0">
+                    <a:solidFill>
+                      <a:srgbClr val="FF0000"/>
+                    </a:solidFill>
+                  </a:rPr>
+                  <a:t>0</a:t>
+                </a:r>
+                <a:endParaRPr lang="en-KR" b="1" dirty="0">
+                  <a:solidFill>
+                    <a:srgbClr val="FF0000"/>
+                  </a:solidFill>
+                </a:endParaRPr>
+              </a:p>
+            </p:txBody>
+          </p:sp>
+        </p:grpSp>
+        <p:grpSp>
+          <p:nvGrpSpPr>
+            <p:cNvPr id="11" name="Group 10">
+              <a:extLst>
+                <a:ext uri="{FF2B5EF4-FFF2-40B4-BE49-F238E27FC236}">
+                  <a16:creationId xmlns:a16="http://schemas.microsoft.com/office/drawing/2014/main" id="{D2950CD6-1391-C6C7-3527-02009CCD9044}"/>
+                </a:ext>
+              </a:extLst>
+            </p:cNvPr>
+            <p:cNvGrpSpPr>
+              <a:grpSpLocks noChangeAspect="1"/>
+            </p:cNvGrpSpPr>
+            <p:nvPr/>
+          </p:nvGrpSpPr>
+          <p:grpSpPr>
+            <a:xfrm>
+              <a:off x="6006619" y="2833606"/>
+              <a:ext cx="1769622" cy="2557718"/>
+              <a:chOff x="1076410" y="2698140"/>
+              <a:chExt cx="2176057" cy="3145156"/>
+            </a:xfrm>
+          </p:grpSpPr>
+          <p:pic>
+            <p:nvPicPr>
+              <p:cNvPr id="12" name="Picture 6" descr="A Dog Face in Front of the Camera Faceing Used for Print Media Stock Image  - Image of lens, media: 372062409">
+                <a:extLst>
+                  <a:ext uri="{FF2B5EF4-FFF2-40B4-BE49-F238E27FC236}">
+                    <a16:creationId xmlns:a16="http://schemas.microsoft.com/office/drawing/2014/main" id="{06B00D56-4A17-909E-9AD2-F8449AD3361F}"/>
+                  </a:ext>
+                </a:extLst>
+              </p:cNvPr>
+              <p:cNvPicPr>
+                <a:picLocks noChangeAspect="1" noChangeArrowheads="1"/>
+              </p:cNvPicPr>
+              <p:nvPr/>
+            </p:nvPicPr>
+            <p:blipFill>
+              <a:blip r:embed="rId4">
+                <a:extLst>
+                  <a:ext uri="{28A0092B-C50C-407E-A947-70E740481C1C}">
+                    <a14:useLocalDpi xmlns:a14="http://schemas.microsoft.com/office/drawing/2010/main" val="0"/>
+                  </a:ext>
+                </a:extLst>
+              </a:blip>
+              <a:srcRect/>
+              <a:stretch>
+                <a:fillRect/>
+              </a:stretch>
+            </p:blipFill>
+            <p:spPr bwMode="auto">
+              <a:xfrm>
+                <a:off x="1222812" y="2698140"/>
+                <a:ext cx="1939636" cy="1939636"/>
+              </a:xfrm>
+              <a:prstGeom prst="rect">
+                <a:avLst/>
+              </a:prstGeom>
+              <a:noFill/>
+              <a:ln>
+                <a:solidFill>
+                  <a:schemeClr val="tx1"/>
+                </a:solidFill>
+              </a:ln>
+              <a:extLst>
+                <a:ext uri="{909E8E84-426E-40DD-AFC4-6F175D3DCCD1}">
+                  <a14:hiddenFill xmlns:a14="http://schemas.microsoft.com/office/drawing/2010/main">
+                    <a:solidFill>
+                      <a:srgbClr val="FFFFFF"/>
+                    </a:solidFill>
+                  </a14:hiddenFill>
+                </a:ext>
+              </a:extLst>
+            </p:spPr>
+          </p:pic>
+          <p:sp>
+            <p:nvSpPr>
+              <p:cNvPr id="13" name="TextBox 12">
+                <a:extLst>
+                  <a:ext uri="{FF2B5EF4-FFF2-40B4-BE49-F238E27FC236}">
+                    <a16:creationId xmlns:a16="http://schemas.microsoft.com/office/drawing/2014/main" id="{B88C3C8C-5370-3635-FFB1-BF3E4823D98F}"/>
+                  </a:ext>
+                </a:extLst>
+              </p:cNvPr>
+              <p:cNvSpPr txBox="1"/>
+              <p:nvPr/>
+            </p:nvSpPr>
+            <p:spPr>
+              <a:xfrm>
+                <a:off x="1076410" y="4707902"/>
+                <a:ext cx="2176057" cy="1135394"/>
+              </a:xfrm>
+              <a:prstGeom prst="rect">
+                <a:avLst/>
+              </a:prstGeom>
+              <a:noFill/>
+            </p:spPr>
+            <p:txBody>
+              <a:bodyPr wrap="square">
+                <a:spAutoFit/>
+              </a:bodyPr>
+              <a:lstStyle/>
+              <a:p>
+                <a:pPr algn="ctr"/>
+                <a:r>
+                  <a:rPr lang="en-US" dirty="0">
+                    <a:latin typeface="Freesentation 8 ExtraBold" pitchFamily="2" charset="-127"/>
+                    <a:ea typeface="Freesentation 8 ExtraBold" pitchFamily="2" charset="-127"/>
+                    <a:cs typeface="Times New Roman" panose="02020603050405020304" pitchFamily="18" charset="0"/>
+                  </a:rPr>
+                  <a:t>Deletion Test2</a:t>
+                </a:r>
+              </a:p>
+              <a:p>
+                <a:pPr algn="ctr"/>
+                <a:r>
+                  <a:rPr lang="en-US" dirty="0"/>
+                  <a:t>Dog: 0.908</a:t>
+                </a:r>
+              </a:p>
+              <a:p>
+                <a:pPr algn="ctr"/>
+                <a:r>
+                  <a:rPr lang="en-US" altLang="zh-CN" b="1" dirty="0" err="1">
+                    <a:solidFill>
+                      <a:srgbClr val="FF0000"/>
+                    </a:solidFill>
+                  </a:rPr>
+                  <a:t>FaithDrop</a:t>
+                </a:r>
+                <a:r>
+                  <a:rPr lang="en-US" altLang="zh-CN" b="1" dirty="0">
+                    <a:solidFill>
+                      <a:srgbClr val="FF0000"/>
+                    </a:solidFill>
+                  </a:rPr>
+                  <a:t>=0.065</a:t>
+                </a:r>
+                <a:endParaRPr lang="en-KR" altLang="zh-CN" b="1" dirty="0">
+                  <a:solidFill>
+                    <a:srgbClr val="FF0000"/>
+                  </a:solidFill>
+                </a:endParaRPr>
+              </a:p>
+            </p:txBody>
+          </p:sp>
+        </p:grpSp>
+        <p:grpSp>
+          <p:nvGrpSpPr>
+            <p:cNvPr id="14" name="Group 13">
+              <a:extLst>
+                <a:ext uri="{FF2B5EF4-FFF2-40B4-BE49-F238E27FC236}">
+                  <a16:creationId xmlns:a16="http://schemas.microsoft.com/office/drawing/2014/main" id="{B1C155DE-ADE2-C6BB-82AC-8A796D3EFB49}"/>
+                </a:ext>
+              </a:extLst>
+            </p:cNvPr>
+            <p:cNvGrpSpPr>
+              <a:grpSpLocks noChangeAspect="1"/>
+            </p:cNvGrpSpPr>
+            <p:nvPr/>
+          </p:nvGrpSpPr>
+          <p:grpSpPr>
+            <a:xfrm>
+              <a:off x="7983978" y="2833606"/>
+              <a:ext cx="1769622" cy="2557718"/>
+              <a:chOff x="1104602" y="2698140"/>
+              <a:chExt cx="2176057" cy="3145156"/>
+            </a:xfrm>
+          </p:grpSpPr>
+          <p:pic>
+            <p:nvPicPr>
+              <p:cNvPr id="15" name="Picture 6" descr="A Dog Face in Front of the Camera Faceing Used for Print Media Stock Image  - Image of lens, media: 372062409">
+                <a:extLst>
+                  <a:ext uri="{FF2B5EF4-FFF2-40B4-BE49-F238E27FC236}">
+                    <a16:creationId xmlns:a16="http://schemas.microsoft.com/office/drawing/2014/main" id="{34E5F55E-DDAD-70A2-BAF8-8C77A824932B}"/>
+                  </a:ext>
+                </a:extLst>
+              </p:cNvPr>
+              <p:cNvPicPr>
+                <a:picLocks noChangeAspect="1" noChangeArrowheads="1"/>
+              </p:cNvPicPr>
+              <p:nvPr/>
+            </p:nvPicPr>
+            <p:blipFill>
+              <a:blip r:embed="rId4">
+                <a:extLst>
+                  <a:ext uri="{28A0092B-C50C-407E-A947-70E740481C1C}">
+                    <a14:useLocalDpi xmlns:a14="http://schemas.microsoft.com/office/drawing/2010/main" val="0"/>
+                  </a:ext>
+                </a:extLst>
+              </a:blip>
+              <a:srcRect/>
+              <a:stretch>
+                <a:fillRect/>
+              </a:stretch>
+            </p:blipFill>
+            <p:spPr bwMode="auto">
+              <a:xfrm>
+                <a:off x="1222812" y="2698140"/>
+                <a:ext cx="1939636" cy="1939636"/>
+              </a:xfrm>
+              <a:prstGeom prst="rect">
+                <a:avLst/>
+              </a:prstGeom>
+              <a:noFill/>
+              <a:ln>
+                <a:solidFill>
+                  <a:schemeClr val="tx1"/>
+                </a:solidFill>
+              </a:ln>
+              <a:extLst>
+                <a:ext uri="{909E8E84-426E-40DD-AFC4-6F175D3DCCD1}">
+                  <a14:hiddenFill xmlns:a14="http://schemas.microsoft.com/office/drawing/2010/main">
+                    <a:solidFill>
+                      <a:srgbClr val="FFFFFF"/>
+                    </a:solidFill>
+                  </a14:hiddenFill>
+                </a:ext>
+              </a:extLst>
+            </p:spPr>
+          </p:pic>
+          <p:sp>
+            <p:nvSpPr>
+              <p:cNvPr id="16" name="TextBox 15">
+                <a:extLst>
+                  <a:ext uri="{FF2B5EF4-FFF2-40B4-BE49-F238E27FC236}">
+                    <a16:creationId xmlns:a16="http://schemas.microsoft.com/office/drawing/2014/main" id="{23062F4F-605D-6B6E-748C-EF6C49258377}"/>
+                  </a:ext>
+                </a:extLst>
+              </p:cNvPr>
+              <p:cNvSpPr txBox="1"/>
+              <p:nvPr/>
+            </p:nvSpPr>
+            <p:spPr>
+              <a:xfrm>
+                <a:off x="1104602" y="4707902"/>
+                <a:ext cx="2176057" cy="1135394"/>
+              </a:xfrm>
+              <a:prstGeom prst="rect">
+                <a:avLst/>
+              </a:prstGeom>
+              <a:noFill/>
+            </p:spPr>
+            <p:txBody>
+              <a:bodyPr wrap="square">
+                <a:spAutoFit/>
+              </a:bodyPr>
+              <a:lstStyle/>
+              <a:p>
+                <a:pPr algn="ctr"/>
+                <a:r>
+                  <a:rPr lang="en-US" dirty="0">
+                    <a:latin typeface="Freesentation 8 ExtraBold" pitchFamily="2" charset="-127"/>
+                    <a:ea typeface="Freesentation 8 ExtraBold" pitchFamily="2" charset="-127"/>
+                    <a:cs typeface="Times New Roman" panose="02020603050405020304" pitchFamily="18" charset="0"/>
+                  </a:rPr>
+                  <a:t>Deletion Test3</a:t>
+                </a:r>
+              </a:p>
+              <a:p>
+                <a:pPr algn="ctr"/>
+                <a:r>
+                  <a:rPr lang="en-US" dirty="0"/>
+                  <a:t>Dog: 0.857</a:t>
+                </a:r>
+              </a:p>
+              <a:p>
+                <a:pPr algn="ctr"/>
+                <a:r>
+                  <a:rPr lang="en-US" b="1" dirty="0" err="1">
+                    <a:solidFill>
+                      <a:srgbClr val="FF0000"/>
+                    </a:solidFill>
+                  </a:rPr>
+                  <a:t>FaithDrop</a:t>
+                </a:r>
+                <a:r>
+                  <a:rPr lang="en-US" b="1" dirty="0">
+                    <a:solidFill>
+                      <a:srgbClr val="FF0000"/>
+                    </a:solidFill>
+                  </a:rPr>
+                  <a:t>=0.116</a:t>
+                </a:r>
+                <a:endParaRPr lang="en-KR" b="1" dirty="0">
+                  <a:solidFill>
+                    <a:srgbClr val="FF0000"/>
+                  </a:solidFill>
+                </a:endParaRPr>
+              </a:p>
+            </p:txBody>
+          </p:sp>
+        </p:grpSp>
+      </p:grpSp>
+      <p:sp>
+        <p:nvSpPr>
+          <p:cNvPr id="18" name="Rectangle 17">
+            <a:extLst>
+              <a:ext uri="{FF2B5EF4-FFF2-40B4-BE49-F238E27FC236}">
+                <a16:creationId xmlns:a16="http://schemas.microsoft.com/office/drawing/2014/main" id="{E0EB67C4-DD15-8534-C122-93BEBEFF0705}"/>
+              </a:ext>
+            </a:extLst>
+          </p:cNvPr>
+          <p:cNvSpPr/>
+          <p:nvPr/>
+        </p:nvSpPr>
+        <p:spPr>
+          <a:xfrm>
+            <a:off x="5497159" y="3812451"/>
+            <a:ext cx="192092" cy="276950"/>
+          </a:xfrm>
+          <a:prstGeom prst="rect">
+            <a:avLst/>
+          </a:prstGeom>
+          <a:solidFill>
+            <a:schemeClr val="tx1">
+              <a:lumMod val="50000"/>
+              <a:lumOff val="50000"/>
+            </a:schemeClr>
+          </a:solidFill>
+          <a:ln>
+            <a:noFill/>
+          </a:ln>
+        </p:spPr>
+        <p:style>
+          <a:lnRef idx="2">
+            <a:schemeClr val="accent1">
+              <a:shade val="15000"/>
+            </a:schemeClr>
+          </a:lnRef>
+          <a:fillRef idx="1">
+            <a:schemeClr val="accent1"/>
+          </a:fillRef>
+          <a:effectRef idx="0">
+            <a:schemeClr val="accent1"/>
+          </a:effectRef>
+          <a:fontRef idx="minor">
+            <a:schemeClr val="lt1"/>
+          </a:fontRef>
+        </p:style>
+        <p:txBody>
+          <a:bodyPr rtlCol="0" anchor="ctr"/>
+          <a:lstStyle/>
+          <a:p>
+            <a:pPr algn="ctr"/>
+            <a:endParaRPr lang="en-KR"/>
+          </a:p>
+        </p:txBody>
+      </p:sp>
+      <p:sp>
+        <p:nvSpPr>
+          <p:cNvPr id="19" name="Rectangle 18">
+            <a:extLst>
+              <a:ext uri="{FF2B5EF4-FFF2-40B4-BE49-F238E27FC236}">
+                <a16:creationId xmlns:a16="http://schemas.microsoft.com/office/drawing/2014/main" id="{71B5B522-2962-0544-85B3-7F092C820463}"/>
+              </a:ext>
+            </a:extLst>
+          </p:cNvPr>
+          <p:cNvSpPr/>
+          <p:nvPr/>
+        </p:nvSpPr>
+        <p:spPr>
+          <a:xfrm>
+            <a:off x="6066324" y="2895600"/>
+            <a:ext cx="317544" cy="916851"/>
+          </a:xfrm>
+          <a:prstGeom prst="rect">
+            <a:avLst/>
+          </a:prstGeom>
+          <a:solidFill>
+            <a:schemeClr val="tx1">
+              <a:lumMod val="50000"/>
+              <a:lumOff val="50000"/>
+            </a:schemeClr>
+          </a:solidFill>
+          <a:ln>
+            <a:noFill/>
+          </a:ln>
+        </p:spPr>
+        <p:style>
+          <a:lnRef idx="2">
+            <a:schemeClr val="accent1">
+              <a:shade val="15000"/>
+            </a:schemeClr>
+          </a:lnRef>
+          <a:fillRef idx="1">
+            <a:schemeClr val="accent1"/>
+          </a:fillRef>
+          <a:effectRef idx="0">
+            <a:schemeClr val="accent1"/>
+          </a:effectRef>
+          <a:fontRef idx="minor">
+            <a:schemeClr val="lt1"/>
+          </a:fontRef>
+        </p:style>
+        <p:txBody>
+          <a:bodyPr rtlCol="0" anchor="ctr"/>
+          <a:lstStyle/>
+          <a:p>
+            <a:pPr algn="ctr"/>
+            <a:endParaRPr lang="en-KR"/>
+          </a:p>
+        </p:txBody>
+      </p:sp>
+      <p:sp>
+        <p:nvSpPr>
+          <p:cNvPr id="20" name="Rectangle 19">
+            <a:extLst>
+              <a:ext uri="{FF2B5EF4-FFF2-40B4-BE49-F238E27FC236}">
+                <a16:creationId xmlns:a16="http://schemas.microsoft.com/office/drawing/2014/main" id="{FC61495E-92DE-38F0-4254-91F89851A40A}"/>
+              </a:ext>
+            </a:extLst>
+          </p:cNvPr>
+          <p:cNvSpPr/>
+          <p:nvPr/>
+        </p:nvSpPr>
+        <p:spPr>
+          <a:xfrm>
+            <a:off x="7326140" y="2895600"/>
+            <a:ext cx="317544" cy="916851"/>
+          </a:xfrm>
+          <a:prstGeom prst="rect">
+            <a:avLst/>
+          </a:prstGeom>
+          <a:solidFill>
+            <a:schemeClr val="tx1">
+              <a:lumMod val="50000"/>
+              <a:lumOff val="50000"/>
+            </a:schemeClr>
+          </a:solidFill>
+          <a:ln>
+            <a:noFill/>
+          </a:ln>
+        </p:spPr>
+        <p:style>
+          <a:lnRef idx="2">
+            <a:schemeClr val="accent1">
+              <a:shade val="15000"/>
+            </a:schemeClr>
+          </a:lnRef>
+          <a:fillRef idx="1">
+            <a:schemeClr val="accent1"/>
+          </a:fillRef>
+          <a:effectRef idx="0">
+            <a:schemeClr val="accent1"/>
+          </a:effectRef>
+          <a:fontRef idx="minor">
+            <a:schemeClr val="lt1"/>
+          </a:fontRef>
+        </p:style>
+        <p:txBody>
+          <a:bodyPr rtlCol="0" anchor="ctr"/>
+          <a:lstStyle/>
+          <a:p>
+            <a:pPr algn="ctr"/>
+            <a:endParaRPr lang="en-KR"/>
+          </a:p>
+        </p:txBody>
+      </p:sp>
+      <p:sp>
+        <p:nvSpPr>
+          <p:cNvPr id="21" name="Rectangle 20">
+            <a:extLst>
+              <a:ext uri="{FF2B5EF4-FFF2-40B4-BE49-F238E27FC236}">
+                <a16:creationId xmlns:a16="http://schemas.microsoft.com/office/drawing/2014/main" id="{6112A083-BDF6-B89D-776E-94D0D6E3D394}"/>
+              </a:ext>
+            </a:extLst>
+          </p:cNvPr>
+          <p:cNvSpPr/>
+          <p:nvPr/>
+        </p:nvSpPr>
+        <p:spPr>
+          <a:xfrm>
+            <a:off x="8479235" y="3429000"/>
+            <a:ext cx="660400" cy="660401"/>
+          </a:xfrm>
+          <a:prstGeom prst="rect">
+            <a:avLst/>
+          </a:prstGeom>
+          <a:solidFill>
+            <a:schemeClr val="tx1">
+              <a:lumMod val="50000"/>
+              <a:lumOff val="50000"/>
+            </a:schemeClr>
+          </a:solidFill>
+          <a:ln>
+            <a:noFill/>
+          </a:ln>
+        </p:spPr>
+        <p:style>
+          <a:lnRef idx="2">
+            <a:schemeClr val="accent1">
+              <a:shade val="15000"/>
+            </a:schemeClr>
+          </a:lnRef>
+          <a:fillRef idx="1">
+            <a:schemeClr val="accent1"/>
+          </a:fillRef>
+          <a:effectRef idx="0">
+            <a:schemeClr val="accent1"/>
+          </a:effectRef>
+          <a:fontRef idx="minor">
+            <a:schemeClr val="lt1"/>
+          </a:fontRef>
+        </p:style>
+        <p:txBody>
+          <a:bodyPr rtlCol="0" anchor="ctr"/>
+          <a:lstStyle/>
+          <a:p>
+            <a:pPr algn="ctr"/>
+            <a:endParaRPr lang="en-KR"/>
+          </a:p>
+        </p:txBody>
+      </p:sp>
     </p:spTree>
     <p:extLst>
       <p:ext uri="{BB962C8B-B14F-4D97-AF65-F5344CB8AC3E}">
